--- a/ClassMaterials/SimpleObjects/Slides/Part1-Help-and-Academic-Integrity.pptx
+++ b/ClassMaterials/SimpleObjects/Slides/Part1-Help-and-Academic-Integrity.pptx
@@ -430,7 +430,7 @@
               <a:pPr>
                 <a:defRPr/>
               </a:pPr>
-              <a:t>9/9/2026</a:t>
+              <a:t>9/11/2026</a:t>
             </a:fld>
             <a:endParaRPr lang="en-US"/>
           </a:p>
@@ -665,7 +665,7 @@
               <a:pPr>
                 <a:defRPr/>
               </a:pPr>
-              <a:t>9/9/2026</a:t>
+              <a:t>9/11/2026</a:t>
             </a:fld>
             <a:endParaRPr lang="en-US"/>
           </a:p>
@@ -2109,7 +2109,7 @@
               <a:pPr>
                 <a:defRPr/>
               </a:pPr>
-              <a:t>Wednesday, September 9, 2026</a:t>
+              <a:t>Friday, September 11, 2026</a:t>
             </a:fld>
             <a:endParaRPr lang="en-US"/>
           </a:p>
@@ -2292,7 +2292,7 @@
               <a:pPr>
                 <a:defRPr/>
               </a:pPr>
-              <a:t>Wednesday, September 9, 2026</a:t>
+              <a:t>Friday, September 11, 2026</a:t>
             </a:fld>
             <a:endParaRPr lang="en-US"/>
           </a:p>
@@ -2485,7 +2485,7 @@
               <a:pPr>
                 <a:defRPr/>
               </a:pPr>
-              <a:t>Wednesday, September 9, 2026</a:t>
+              <a:t>Friday, September 11, 2026</a:t>
             </a:fld>
             <a:endParaRPr lang="en-US"/>
           </a:p>
@@ -2668,7 +2668,7 @@
               <a:pPr>
                 <a:defRPr/>
               </a:pPr>
-              <a:t>Wednesday, September 9, 2026</a:t>
+              <a:t>Friday, September 11, 2026</a:t>
             </a:fld>
             <a:endParaRPr lang="en-US"/>
           </a:p>
@@ -2928,7 +2928,7 @@
               <a:pPr>
                 <a:defRPr/>
               </a:pPr>
-              <a:t>Wednesday, September 9, 2026</a:t>
+              <a:t>Friday, September 11, 2026</a:t>
             </a:fld>
             <a:endParaRPr lang="en-US"/>
           </a:p>
@@ -3228,7 +3228,7 @@
               <a:pPr>
                 <a:defRPr/>
               </a:pPr>
-              <a:t>Wednesday, September 9, 2026</a:t>
+              <a:t>Friday, September 11, 2026</a:t>
             </a:fld>
             <a:endParaRPr lang="en-US"/>
           </a:p>
@@ -3662,7 +3662,7 @@
               <a:pPr>
                 <a:defRPr/>
               </a:pPr>
-              <a:t>Wednesday, September 9, 2026</a:t>
+              <a:t>Friday, September 11, 2026</a:t>
             </a:fld>
             <a:endParaRPr lang="en-US"/>
           </a:p>
@@ -3794,7 +3794,7 @@
               <a:pPr>
                 <a:defRPr/>
               </a:pPr>
-              <a:t>Wednesday, September 9, 2026</a:t>
+              <a:t>Friday, September 11, 2026</a:t>
             </a:fld>
             <a:endParaRPr lang="en-US"/>
           </a:p>
@@ -3904,7 +3904,7 @@
               <a:pPr>
                 <a:defRPr/>
               </a:pPr>
-              <a:t>Wednesday, September 9, 2026</a:t>
+              <a:t>Friday, September 11, 2026</a:t>
             </a:fld>
             <a:endParaRPr lang="en-US"/>
           </a:p>
@@ -4194,7 +4194,7 @@
               <a:pPr>
                 <a:defRPr/>
               </a:pPr>
-              <a:t>Wednesday, September 9, 2026</a:t>
+              <a:t>Friday, September 11, 2026</a:t>
             </a:fld>
             <a:endParaRPr lang="en-US"/>
           </a:p>
@@ -4461,7 +4461,7 @@
               <a:pPr>
                 <a:defRPr/>
               </a:pPr>
-              <a:t>Wednesday, September 9, 2026</a:t>
+              <a:t>Friday, September 11, 2026</a:t>
             </a:fld>
             <a:endParaRPr lang="en-US"/>
           </a:p>
@@ -4687,7 +4687,7 @@
               <a:pPr>
                 <a:defRPr/>
               </a:pPr>
-              <a:t>Wednesday, September 9, 2026</a:t>
+              <a:t>Friday, September 11, 2026</a:t>
             </a:fld>
             <a:endParaRPr lang="en-US"/>
           </a:p>
@@ -5121,30 +5121,9 @@
           <a:p>
             <a:r>
               <a:rPr lang="en-US" sz="2500" i="1" dirty="0" err="1"/>
-              <a:t>HWMaps</a:t>
-            </a:r>
-            <a:r>
-              <a:rPr lang="en-US" sz="2500" dirty="0"/>
-              <a:t> &amp; </a:t>
-            </a:r>
-            <a:r>
-              <a:rPr lang="en-US" i="1" spc="-1" dirty="0" err="1">
-                <a:solidFill>
-                  <a:srgbClr val="000000"/>
-                </a:solidFill>
-                <a:uFill>
-                  <a:solidFill>
-                    <a:srgbClr val="FFFFFF"/>
-                  </a:solidFill>
-                </a:uFill>
-                <a:latin typeface="Calibri"/>
-              </a:rPr>
-              <a:t>StudentGradebook</a:t>
-            </a:r>
-            <a:r>
-              <a:rPr lang="en-US" sz="2500" dirty="0"/>
-              <a:t> </a:t>
-            </a:r>
+              <a:t>SimpleObjects</a:t>
+            </a:r>
+            <a:endParaRPr lang="en-US" sz="2500" dirty="0"/>
           </a:p>
           <a:p>
             <a:pPr marR="0" eaLnBrk="1" hangingPunct="1">
@@ -5354,14 +5333,14 @@
               <a:defRPr sz="1800"/>
             </a:pPr>
             <a:r>
-              <a:rPr sz="3200"/>
+              <a:rPr sz="3200" dirty="0"/>
               <a:t>Old school</a:t>
             </a:r>
             <a:br>
-              <a:rPr sz="3200"/>
+              <a:rPr sz="3200" dirty="0"/>
             </a:br>
             <a:r>
-              <a:rPr sz="2400">
+              <a:rPr sz="2400" dirty="0">
                 <a:solidFill>
                   <a:srgbClr val="4F81BD"/>
                 </a:solidFill>
@@ -5373,7 +5352,7 @@
               <a:t>double</a:t>
             </a:r>
             <a:r>
-              <a:rPr lang="en-US" sz="2400">
+              <a:rPr lang="en-US" sz="2400" dirty="0">
                 <a:solidFill>
                   <a:srgbClr val="4F81BD"/>
                 </a:solidFill>
@@ -5385,7 +5364,7 @@
               <a:t>[]</a:t>
             </a:r>
             <a:r>
-              <a:rPr sz="2400">
+              <a:rPr sz="2400" dirty="0">
                 <a:solidFill>
                   <a:srgbClr val="4F81BD"/>
                 </a:solidFill>
@@ -5397,7 +5376,7 @@
               <a:t> scores = …</a:t>
             </a:r>
             <a:br>
-              <a:rPr sz="2400">
+              <a:rPr sz="2400" dirty="0">
                 <a:solidFill>
                   <a:srgbClr val="4F81BD"/>
                 </a:solidFill>
@@ -5408,7 +5387,7 @@
               </a:rPr>
             </a:br>
             <a:r>
-              <a:rPr sz="2400">
+              <a:rPr sz="2400" dirty="0">
                 <a:solidFill>
                   <a:srgbClr val="4F81BD"/>
                 </a:solidFill>
@@ -5420,7 +5399,7 @@
               <a:t>double sum = 0.0;</a:t>
             </a:r>
             <a:br>
-              <a:rPr sz="2400">
+              <a:rPr sz="2400" dirty="0">
                 <a:solidFill>
                   <a:srgbClr val="4F81BD"/>
                 </a:solidFill>
@@ -5431,7 +5410,7 @@
               </a:rPr>
             </a:br>
             <a:r>
-              <a:rPr sz="2400" b="1">
+              <a:rPr sz="2400" b="1" dirty="0">
                 <a:solidFill>
                   <a:srgbClr val="4F81BD"/>
                 </a:solidFill>
@@ -5443,7 +5422,7 @@
               <a:t>for</a:t>
             </a:r>
             <a:r>
-              <a:rPr sz="2400">
+              <a:rPr sz="2400" dirty="0">
                 <a:solidFill>
                   <a:srgbClr val="4F81BD"/>
                 </a:solidFill>
@@ -5455,7 +5434,7 @@
               <a:t> (int </a:t>
             </a:r>
             <a:r>
-              <a:rPr lang="en-US" sz="2400" err="1">
+              <a:rPr lang="en-US" sz="2400" dirty="0" err="1">
                 <a:solidFill>
                   <a:srgbClr val="4F81BD"/>
                 </a:solidFill>
@@ -5467,7 +5446,7 @@
               <a:t>i</a:t>
             </a:r>
             <a:r>
-              <a:rPr lang="en-US" sz="2400">
+              <a:rPr lang="en-US" sz="2400" dirty="0">
                 <a:solidFill>
                   <a:srgbClr val="4F81BD"/>
                 </a:solidFill>
@@ -5479,7 +5458,7 @@
               <a:t> </a:t>
             </a:r>
             <a:r>
-              <a:rPr sz="2400">
+              <a:rPr sz="2400" dirty="0">
                 <a:solidFill>
                   <a:srgbClr val="4F81BD"/>
                 </a:solidFill>
@@ -5491,7 +5470,7 @@
               <a:t>=</a:t>
             </a:r>
             <a:r>
-              <a:rPr lang="en-US" sz="2400">
+              <a:rPr lang="en-US" sz="2400" dirty="0">
                 <a:solidFill>
                   <a:srgbClr val="4F81BD"/>
                 </a:solidFill>
@@ -5503,7 +5482,7 @@
               <a:t> </a:t>
             </a:r>
             <a:r>
-              <a:rPr sz="2400">
+              <a:rPr sz="2400" dirty="0">
                 <a:solidFill>
                   <a:srgbClr val="4F81BD"/>
                 </a:solidFill>
@@ -5515,7 +5494,7 @@
               <a:t>0; </a:t>
             </a:r>
             <a:r>
-              <a:rPr sz="2400" err="1">
+              <a:rPr sz="2400" dirty="0" err="1">
                 <a:solidFill>
                   <a:srgbClr val="4F81BD"/>
                 </a:solidFill>
@@ -5527,7 +5506,7 @@
               <a:t>i</a:t>
             </a:r>
             <a:r>
-              <a:rPr sz="2400">
+              <a:rPr sz="2400" dirty="0">
                 <a:solidFill>
                   <a:srgbClr val="4F81BD"/>
                 </a:solidFill>
@@ -5539,7 +5518,7 @@
               <a:t> &lt; </a:t>
             </a:r>
             <a:r>
-              <a:rPr sz="2400" err="1">
+              <a:rPr sz="2400" dirty="0" err="1">
                 <a:solidFill>
                   <a:srgbClr val="4F81BD"/>
                 </a:solidFill>
@@ -5551,7 +5530,7 @@
               <a:t>scores.length</a:t>
             </a:r>
             <a:r>
-              <a:rPr sz="2400">
+              <a:rPr sz="2400" dirty="0">
                 <a:solidFill>
                   <a:srgbClr val="4F81BD"/>
                 </a:solidFill>
@@ -5563,7 +5542,7 @@
               <a:t>; </a:t>
             </a:r>
             <a:r>
-              <a:rPr sz="2400" err="1">
+              <a:rPr sz="2400" dirty="0" err="1">
                 <a:solidFill>
                   <a:srgbClr val="4F81BD"/>
                 </a:solidFill>
@@ -5575,7 +5554,7 @@
               <a:t>i</a:t>
             </a:r>
             <a:r>
-              <a:rPr sz="2400">
+              <a:rPr sz="2400" dirty="0">
                 <a:solidFill>
                   <a:srgbClr val="4F81BD"/>
                 </a:solidFill>
@@ -5587,7 +5566,7 @@
               <a:t>++) {</a:t>
             </a:r>
             <a:br>
-              <a:rPr sz="2400">
+              <a:rPr sz="2400" dirty="0">
                 <a:solidFill>
                   <a:srgbClr val="4F81BD"/>
                 </a:solidFill>
@@ -5598,7 +5577,7 @@
               </a:rPr>
             </a:br>
             <a:r>
-              <a:rPr sz="2400">
+              <a:rPr sz="2400" dirty="0">
                 <a:solidFill>
                   <a:srgbClr val="4F81BD"/>
                 </a:solidFill>
@@ -5610,7 +5589,7 @@
               <a:t>	sum += scores[</a:t>
             </a:r>
             <a:r>
-              <a:rPr sz="2400" err="1">
+              <a:rPr sz="2400" dirty="0" err="1">
                 <a:solidFill>
                   <a:srgbClr val="4F81BD"/>
                 </a:solidFill>
@@ -5622,7 +5601,7 @@
               <a:t>i</a:t>
             </a:r>
             <a:r>
-              <a:rPr sz="2400">
+              <a:rPr sz="2400" dirty="0">
                 <a:solidFill>
                   <a:srgbClr val="4F81BD"/>
                 </a:solidFill>
@@ -5634,7 +5613,7 @@
               <a:t>];</a:t>
             </a:r>
             <a:br>
-              <a:rPr sz="2400">
+              <a:rPr sz="2400" dirty="0">
                 <a:solidFill>
                   <a:srgbClr val="4F81BD"/>
                 </a:solidFill>
@@ -5645,7 +5624,7 @@
               </a:rPr>
             </a:br>
             <a:r>
-              <a:rPr sz="2400">
+              <a:rPr sz="2400" dirty="0">
                 <a:solidFill>
                   <a:srgbClr val="4F81BD"/>
                 </a:solidFill>
@@ -5657,7 +5636,7 @@
               <a:t>}</a:t>
             </a:r>
             <a:r>
-              <a:rPr lang="en-US" sz="2400">
+              <a:rPr lang="en-US" sz="2400" dirty="0">
                 <a:solidFill>
                   <a:srgbClr val="4F81BD"/>
                 </a:solidFill>
@@ -5668,7 +5647,7 @@
               </a:rPr>
               <a:t> // end for</a:t>
             </a:r>
-            <a:endParaRPr sz="2400">
+            <a:endParaRPr sz="2400" dirty="0">
               <a:solidFill>
                 <a:srgbClr val="4F81BD"/>
               </a:solidFill>
@@ -5688,14 +5667,14 @@
               <a:defRPr sz="1800"/>
             </a:pPr>
             <a:r>
-              <a:rPr sz="3200"/>
+              <a:rPr sz="3200" dirty="0"/>
               <a:t>New, whiz-bang, enhanced for loop</a:t>
             </a:r>
             <a:br>
-              <a:rPr sz="3200"/>
+              <a:rPr sz="3200" dirty="0"/>
             </a:br>
             <a:r>
-              <a:rPr sz="2400">
+              <a:rPr sz="2400" dirty="0">
                 <a:solidFill>
                   <a:srgbClr val="9BBB59"/>
                 </a:solidFill>
@@ -5707,7 +5686,7 @@
               <a:t>double</a:t>
             </a:r>
             <a:r>
-              <a:rPr lang="en-US" sz="2400">
+              <a:rPr lang="en-US" sz="2400" dirty="0">
                 <a:solidFill>
                   <a:srgbClr val="9BBB59"/>
                 </a:solidFill>
@@ -5719,7 +5698,7 @@
               <a:t>[]</a:t>
             </a:r>
             <a:r>
-              <a:rPr sz="2400">
+              <a:rPr sz="2400" dirty="0">
                 <a:solidFill>
                   <a:srgbClr val="9BBB59"/>
                 </a:solidFill>
@@ -5731,7 +5710,7 @@
               <a:t> </a:t>
             </a:r>
             <a:r>
-              <a:rPr sz="2400">
+              <a:rPr sz="2400" dirty="0">
                 <a:solidFill>
                   <a:srgbClr val="C3D69B"/>
                 </a:solidFill>
@@ -5743,7 +5722,7 @@
               <a:t>scores</a:t>
             </a:r>
             <a:r>
-              <a:rPr sz="2400">
+              <a:rPr sz="2400" dirty="0">
                 <a:solidFill>
                   <a:srgbClr val="9BBB59"/>
                 </a:solidFill>
@@ -5755,7 +5734,7 @@
               <a:t> = …</a:t>
             </a:r>
             <a:br>
-              <a:rPr sz="2400">
+              <a:rPr sz="2400" dirty="0">
                 <a:solidFill>
                   <a:srgbClr val="9BBB59"/>
                 </a:solidFill>
@@ -5766,7 +5745,7 @@
               </a:rPr>
             </a:br>
             <a:r>
-              <a:rPr sz="2400">
+              <a:rPr sz="2400" dirty="0">
                 <a:solidFill>
                   <a:srgbClr val="9BBB59"/>
                 </a:solidFill>
@@ -5778,7 +5757,7 @@
               <a:t>double sum = 0.0;</a:t>
             </a:r>
             <a:br>
-              <a:rPr sz="2400">
+              <a:rPr sz="2400" dirty="0">
                 <a:solidFill>
                   <a:srgbClr val="9BBB59"/>
                 </a:solidFill>
@@ -5789,7 +5768,7 @@
               </a:rPr>
             </a:br>
             <a:r>
-              <a:rPr sz="2400" b="1">
+              <a:rPr sz="2400" b="1" dirty="0">
                 <a:solidFill>
                   <a:srgbClr val="9BBB59"/>
                 </a:solidFill>
@@ -5801,7 +5780,7 @@
               <a:t>for</a:t>
             </a:r>
             <a:r>
-              <a:rPr sz="2400">
+              <a:rPr sz="2400" dirty="0">
                 <a:solidFill>
                   <a:srgbClr val="9BBB59"/>
                 </a:solidFill>
@@ -5813,7 +5792,7 @@
               <a:t> (double </a:t>
             </a:r>
             <a:r>
-              <a:rPr sz="2400">
+              <a:rPr sz="2400" dirty="0">
                 <a:solidFill>
                   <a:srgbClr val="77933C"/>
                 </a:solidFill>
@@ -5825,7 +5804,7 @@
               <a:t>score</a:t>
             </a:r>
             <a:r>
-              <a:rPr sz="2400">
+              <a:rPr sz="2400" dirty="0">
                 <a:solidFill>
                   <a:srgbClr val="9BBB59"/>
                 </a:solidFill>
@@ -5837,7 +5816,7 @@
               <a:t> : </a:t>
             </a:r>
             <a:r>
-              <a:rPr sz="2400">
+              <a:rPr sz="2400" dirty="0">
                 <a:solidFill>
                   <a:srgbClr val="C3D69B"/>
                 </a:solidFill>
@@ -5849,7 +5828,7 @@
               <a:t>scores</a:t>
             </a:r>
             <a:r>
-              <a:rPr sz="2400">
+              <a:rPr sz="2400" dirty="0">
                 <a:solidFill>
                   <a:srgbClr val="9BBB59"/>
                 </a:solidFill>
@@ -5861,7 +5840,7 @@
               <a:t>) {</a:t>
             </a:r>
             <a:br>
-              <a:rPr sz="2400">
+              <a:rPr sz="2400" dirty="0">
                 <a:solidFill>
                   <a:srgbClr val="9BBB59"/>
                 </a:solidFill>
@@ -5872,7 +5851,7 @@
               </a:rPr>
             </a:br>
             <a:r>
-              <a:rPr sz="2400">
+              <a:rPr sz="2400" dirty="0">
                 <a:solidFill>
                   <a:srgbClr val="9BBB59"/>
                 </a:solidFill>
@@ -5884,7 +5863,7 @@
               <a:t>	sum += </a:t>
             </a:r>
             <a:r>
-              <a:rPr sz="2400">
+              <a:rPr sz="2400" dirty="0">
                 <a:solidFill>
                   <a:srgbClr val="77933C"/>
                 </a:solidFill>
@@ -5896,7 +5875,7 @@
               <a:t>score</a:t>
             </a:r>
             <a:r>
-              <a:rPr sz="2400">
+              <a:rPr sz="2400" dirty="0">
                 <a:solidFill>
                   <a:srgbClr val="9BBB59"/>
                 </a:solidFill>
@@ -5908,7 +5887,7 @@
               <a:t>;</a:t>
             </a:r>
             <a:br>
-              <a:rPr sz="2400">
+              <a:rPr sz="2400" dirty="0">
                 <a:solidFill>
                   <a:srgbClr val="9BBB59"/>
                 </a:solidFill>
@@ -5919,7 +5898,7 @@
               </a:rPr>
             </a:br>
             <a:r>
-              <a:rPr sz="2400">
+              <a:rPr sz="2400" dirty="0">
                 <a:solidFill>
                   <a:srgbClr val="9BBB59"/>
                 </a:solidFill>
@@ -5931,7 +5910,7 @@
               <a:t>}</a:t>
             </a:r>
             <a:r>
-              <a:rPr lang="en-US" sz="2400">
+              <a:rPr lang="en-US" sz="2400" dirty="0">
                 <a:solidFill>
                   <a:srgbClr val="9BBB59"/>
                 </a:solidFill>
@@ -5942,7 +5921,7 @@
               </a:rPr>
               <a:t> // end for</a:t>
             </a:r>
-            <a:endParaRPr sz="2400">
+            <a:endParaRPr sz="2400" dirty="0">
               <a:solidFill>
                 <a:srgbClr val="9BBB59"/>
               </a:solidFill>
@@ -6033,7 +6012,7 @@
             <a:effectLst/>
             <a:extLst>
               <a:ext uri="{C572A759-6A51-4108-AA02-DFA0A04FC94B}">
-                <ma14:wrappingTextBoxFlag xmlns="" xmlns:ma14="http://schemas.microsoft.com/office/mac/drawingml/2011/main" val="1"/>
+                <ma14:wrappingTextBoxFlag xmlns:ma14="http://schemas.microsoft.com/office/mac/drawingml/2011/main" xmlns="" val="1"/>
               </a:ext>
             </a:extLst>
           </p:spPr>
@@ -6111,7 +6090,7 @@
         </p:nvGrpSpPr>
         <p:grpSpPr>
           <a:xfrm>
-            <a:off x="3922210" y="5127654"/>
+            <a:off x="4241188" y="5127654"/>
             <a:ext cx="1945190" cy="1188171"/>
             <a:chOff x="0" y="0"/>
             <a:chExt cx="1945189" cy="1188170"/>
@@ -6253,7 +6232,7 @@
             <a:effectLst/>
             <a:extLst>
               <a:ext uri="{C572A759-6A51-4108-AA02-DFA0A04FC94B}">
-                <ma14:wrappingTextBoxFlag xmlns="" xmlns:ma14="http://schemas.microsoft.com/office/mac/drawingml/2011/main" val="1"/>
+                <ma14:wrappingTextBoxFlag xmlns:ma14="http://schemas.microsoft.com/office/mac/drawingml/2011/main" xmlns="" val="1"/>
               </a:ext>
             </a:extLst>
           </p:spPr>
@@ -7259,7 +7238,7 @@
           </a:ln>
           <a:extLst>
             <a:ext uri="{C572A759-6A51-4108-AA02-DFA0A04FC94B}">
-              <ma14:wrappingTextBoxFlag xmlns="" xmlns:ma14="http://schemas.microsoft.com/office/mac/drawingml/2011/main" val="1"/>
+              <ma14:wrappingTextBoxFlag xmlns:ma14="http://schemas.microsoft.com/office/mac/drawingml/2011/main" xmlns="" val="1"/>
             </a:ext>
           </a:extLst>
         </p:spPr>
@@ -8235,13 +8214,7 @@
           <a:p>
             <a:r>
               <a:rPr lang="en-US" dirty="0"/>
-              <a:t>Convenient Syntax</a:t>
-            </a:r>
-          </a:p>
-          <a:p>
-            <a:r>
-              <a:rPr lang="en-US" dirty="0"/>
-              <a:t>for iterating through collections</a:t>
+              <a:t>Convenient syntax for iterating through collections</a:t>
             </a:r>
           </a:p>
           <a:p>
@@ -9197,6 +9170,12 @@
 </file>
 
 <file path=customXml/item1.xml><?xml version="1.0" encoding="utf-8"?>
+<p:properties xmlns:p="http://schemas.microsoft.com/office/2006/metadata/properties" xmlns:xsi="http://www.w3.org/2001/XMLSchema-instance" xmlns:pc="http://schemas.microsoft.com/office/infopath/2007/PartnerControls">
+  <documentManagement/>
+</p:properties>
+</file>
+
+<file path=customXml/item2.xml><?xml version="1.0" encoding="utf-8"?>
 <ct:contentTypeSchema xmlns:ct="http://schemas.microsoft.com/office/2006/metadata/contentType" xmlns:ma="http://schemas.microsoft.com/office/2006/metadata/properties/metaAttributes" ct:_="" ma:_="" ma:contentTypeName="Document" ma:contentTypeID="0x0101004285D81DBE5F5A448E892B34D6B8CF20" ma:contentTypeVersion="2" ma:contentTypeDescription="Create a new document." ma:contentTypeScope="" ma:versionID="026ccaf10de5d9915dfa48c6db16b59b">
   <xsd:schema xmlns:xsd="http://www.w3.org/2001/XMLSchema" xmlns:xs="http://www.w3.org/2001/XMLSchema" xmlns:p="http://schemas.microsoft.com/office/2006/metadata/properties" xmlns:ns2="08600313-7276-4ca7-b5d3-7d86193ee0ac" targetNamespace="http://schemas.microsoft.com/office/2006/metadata/properties" ma:root="true" ma:fieldsID="c887e4ee215f388544e22a2030d7ea35" ns2:_="">
     <xsd:import namespace="08600313-7276-4ca7-b5d3-7d86193ee0ac"/>
@@ -9328,12 +9307,6 @@
 </ct:contentTypeSchema>
 </file>
 
-<file path=customXml/item2.xml><?xml version="1.0" encoding="utf-8"?>
-<p:properties xmlns:p="http://schemas.microsoft.com/office/2006/metadata/properties" xmlns:xsi="http://www.w3.org/2001/XMLSchema-instance" xmlns:pc="http://schemas.microsoft.com/office/infopath/2007/PartnerControls">
-  <documentManagement/>
-</p:properties>
-</file>
-
 <file path=customXml/item3.xml><?xml version="1.0" encoding="utf-8"?>
 <?mso-contentType ?>
 <FormTemplates xmlns="http://schemas.microsoft.com/sharepoint/v3/contenttype/forms">
@@ -9344,6 +9317,22 @@
 </file>
 
 <file path=customXml/itemProps1.xml><?xml version="1.0" encoding="utf-8"?>
+<ds:datastoreItem xmlns:ds="http://schemas.openxmlformats.org/officeDocument/2006/customXml" ds:itemID="{F4E211C1-CD9D-46C8-BE98-ADF55AECFF6A}">
+  <ds:schemaRefs>
+    <ds:schemaRef ds:uri="79ddb764-415a-4c38-83b7-908be6382bea"/>
+    <ds:schemaRef ds:uri="http://purl.org/dc/dcmitype/"/>
+    <ds:schemaRef ds:uri="http://purl.org/dc/elements/1.1/"/>
+    <ds:schemaRef ds:uri="http://purl.org/dc/terms/"/>
+    <ds:schemaRef ds:uri="http://schemas.microsoft.com/office/2006/documentManagement/types"/>
+    <ds:schemaRef ds:uri="http://schemas.microsoft.com/office/2006/metadata/properties"/>
+    <ds:schemaRef ds:uri="http://schemas.microsoft.com/office/infopath/2007/PartnerControls"/>
+    <ds:schemaRef ds:uri="http://schemas.openxmlformats.org/package/2006/metadata/core-properties"/>
+    <ds:schemaRef ds:uri="http://www.w3.org/XML/1998/namespace"/>
+  </ds:schemaRefs>
+</ds:datastoreItem>
+</file>
+
+<file path=customXml/itemProps2.xml><?xml version="1.0" encoding="utf-8"?>
 <ds:datastoreItem xmlns:ds="http://schemas.openxmlformats.org/officeDocument/2006/customXml" ds:itemID="{FB830662-5179-45C5-B8BB-41FD5024BBF4}">
   <ds:schemaRefs>
     <ds:schemaRef ds:uri="http://schemas.microsoft.com/office/2006/metadata/contentType"/>
@@ -9361,22 +9350,6 @@
 </ds:datastoreItem>
 </file>
 
-<file path=customXml/itemProps2.xml><?xml version="1.0" encoding="utf-8"?>
-<ds:datastoreItem xmlns:ds="http://schemas.openxmlformats.org/officeDocument/2006/customXml" ds:itemID="{F4E211C1-CD9D-46C8-BE98-ADF55AECFF6A}">
-  <ds:schemaRefs>
-    <ds:schemaRef ds:uri="79ddb764-415a-4c38-83b7-908be6382bea"/>
-    <ds:schemaRef ds:uri="http://purl.org/dc/dcmitype/"/>
-    <ds:schemaRef ds:uri="http://purl.org/dc/elements/1.1/"/>
-    <ds:schemaRef ds:uri="http://purl.org/dc/terms/"/>
-    <ds:schemaRef ds:uri="http://schemas.microsoft.com/office/2006/documentManagement/types"/>
-    <ds:schemaRef ds:uri="http://schemas.microsoft.com/office/2006/metadata/properties"/>
-    <ds:schemaRef ds:uri="http://schemas.microsoft.com/office/infopath/2007/PartnerControls"/>
-    <ds:schemaRef ds:uri="http://schemas.openxmlformats.org/package/2006/metadata/core-properties"/>
-    <ds:schemaRef ds:uri="http://www.w3.org/XML/1998/namespace"/>
-  </ds:schemaRefs>
-</ds:datastoreItem>
-</file>
-
 <file path=customXml/itemProps3.xml><?xml version="1.0" encoding="utf-8"?>
 <ds:datastoreItem xmlns:ds="http://schemas.openxmlformats.org/officeDocument/2006/customXml" ds:itemID="{17FAF4A3-64B4-43E8-BB8B-B01EB9ECAC06}">
   <ds:schemaRefs>
